--- a/slides/Lesson 7 - Your Own Knowledge Base.pptx
+++ b/slides/Lesson 7 - Your Own Knowledge Base.pptx
@@ -10550,7 +10550,7 @@
                 </a:solidFill>
                 <a:latin typeface="Poppins"/>
               </a:rPr>
-              <a:t>Ask that before you blame the prompt. /sources answers it, and costs nothing.</a:t>
+              <a:t>Ask that before you blame the prompt. /sources answers it, and costs next to nothing.</a:t>
             </a:r>
           </a:p>
         </p:txBody>
